--- a/docs/capability-tour.pptx
+++ b/docs/capability-tour.pptx
@@ -3145,7 +3145,7 @@
                 </a:solidFill>
                 <a:latin typeface="PingFang SC"/>
               </a:rPr>
-              <a:t>WorkLoom AI 获客系统 · 短视频社媒营销 × GEO × 获客五环 × 行业运营（首垂直：酒店）</a:t>
+              <a:t>WorkLoom 获客系统 · 短视频社媒营销 × GEO × 获客五环 × 行业运营（首垂直：酒店）</a:t>
             </a:r>
           </a:p>
           <a:p>
@@ -4439,6 +4439,30 @@
                 <a:latin typeface="PingFang SC"/>
               </a:rPr>
               <a:t>   cross-platform-review / deal-flow / demo-mirror / industry-entry 等 — skills/official/</a:t>
+            </a:r>
+          </a:p>
+          <a:p>
+            <a:pPr algn="l"/>
+            <a:r>
+              <a:rPr sz="1700" b="1">
+                <a:solidFill>
+                  <a:srgbClr val="4A2B33"/>
+                </a:solidFill>
+                <a:latin typeface="PingFang SC"/>
+              </a:rPr>
+              <a:t>• 能力导览 PPT</a:t>
+            </a:r>
+          </a:p>
+          <a:p>
+            <a:pPr algn="l"/>
+            <a:r>
+              <a:rPr sz="1300" b="0">
+                <a:solidFill>
+                  <a:srgbClr val="8A4B5A"/>
+                </a:solidFill>
+                <a:latin typeface="PingFang SC"/>
+              </a:rPr>
+              <a:t>   路演/汇报直接用 — docs/capability-tour.pptx</a:t>
             </a:r>
           </a:p>
           <a:p>
